--- a/examples/ppt/transitions/transitions-shapes.pptx
+++ b/examples/ppt/transitions/transitions-shapes.pptx
@@ -5,20 +5,20 @@
     <p:sldMasterId xmlns:r="http://schemas.openxmlformats.org/officeDocument/2006/relationships" id="2147483648" r:id="rId1"/>
   </p:sldMasterIdLst>
   <p:sldIdLst>
-    <p:sldId id="256" r:id="R0a91c9de69574769"/>
-    <p:sldId id="257" r:id="Re183aea8970f4425"/>
-    <p:sldId id="258" r:id="R24d231c83a2c4bd5"/>
-    <p:sldId id="259" r:id="R91fb0e565aa147f4"/>
-    <p:sldId id="260" r:id="R9f3dab2c2bc64956"/>
-    <p:sldId id="261" r:id="Rd94812d213af431b"/>
-    <p:sldId id="262" r:id="Ra0c9759b9be04a25"/>
-    <p:sldId id="263" r:id="R369a898063194e37"/>
-    <p:sldId id="264" r:id="Re0043eea1bec4569"/>
-    <p:sldId id="265" r:id="R50c8abed69ff4b11"/>
-    <p:sldId id="266" r:id="R5e23108b82d64237"/>
-    <p:sldId id="267" r:id="R78b2763a471147c2"/>
-    <p:sldId id="268" r:id="Rebcbc9510c7a44d6"/>
-    <p:sldId id="269" r:id="Rd1e0ae86e7cb4b3c"/>
+    <p:sldId id="256" r:id="Rbe277eca8d184c2d"/>
+    <p:sldId id="257" r:id="R9af57f7dbf4d4181"/>
+    <p:sldId id="258" r:id="Raa454fdc052d4411"/>
+    <p:sldId id="259" r:id="R762548571b694ac4"/>
+    <p:sldId id="260" r:id="Re1b304679e2b4924"/>
+    <p:sldId id="261" r:id="Rf76d47c0b66641e5"/>
+    <p:sldId id="262" r:id="R898c81cbdbbb41e2"/>
+    <p:sldId id="263" r:id="R15fa28fee0194d41"/>
+    <p:sldId id="264" r:id="Rda52354ea3c64740"/>
+    <p:sldId id="265" r:id="R0ff8679353074179"/>
+    <p:sldId id="266" r:id="R6ea69b3cfe0a4578"/>
+    <p:sldId id="267" r:id="R749a9de373394f23"/>
+    <p:sldId id="268" r:id="R803c8502efa34ba6"/>
+    <p:sldId id="269" r:id="R607835a2609748aa"/>
   </p:sldIdLst>
   <p:sldSz cx="12192000" cy="6858000"/>
   <p:notesSz cx="6858000" cy="9144000"/>
@@ -293,7 +293,7 @@
 </file>
 
 <file path=ppt/slideMasters/slideMaster1.xml><?xml version="1.0" encoding="utf-8"?>
-<p:sldMaster xmlns:p="http://schemas.openxmlformats.org/presentationml/2006/main">
+<p:sldMaster xmlns:r="http://schemas.openxmlformats.org/officeDocument/2006/relationships" xmlns:p="http://schemas.openxmlformats.org/presentationml/2006/main">
   <p:cSld>
     <p:spTree>
       <p:nvGrpSpPr>
@@ -327,7 +327,7 @@
       <p:grpSpPr/>
       <p:sp>
         <p:nvSpPr>
-          <p:cNvPr id="10000" name="TextBox 1"/>
+          <p:cNvPr id="100000" name="TextBox 1"/>
           <p:cNvSpPr/>
           <p:nvPr/>
         </p:nvSpPr>
@@ -346,17 +346,12 @@
         <p:txBody>
           <a:bodyPr xmlns:a="http://schemas.openxmlformats.org/drawingml/2006/main"/>
           <a:lstStyle xmlns:a="http://schemas.openxmlformats.org/drawingml/2006/main"/>
-          <a:p xmlns:a="http://schemas.openxmlformats.org/drawingml/2006/main">
-            <a:r>
-              <a:rPr lang="en-US"/>
-              <a:t/>
-            </a:r>
-          </a:p>
-        </p:txBody>
-      </p:sp>
-      <p:sp>
-        <p:nvSpPr>
-          <p:cNvPr id="10001" name="TextBox 2"/>
+          <a:p xmlns:a="http://schemas.openxmlformats.org/drawingml/2006/main"/>
+        </p:txBody>
+      </p:sp>
+      <p:sp>
+        <p:nvSpPr>
+          <p:cNvPr id="100001" name="TextBox 2"/>
           <p:cNvSpPr txBox="1"/>
           <p:nvPr/>
         </p:nvSpPr>
@@ -402,7 +397,7 @@
       <p:grpSpPr/>
       <p:sp>
         <p:nvSpPr>
-          <p:cNvPr id="10018" name="TextBox 1"/>
+          <p:cNvPr id="100018" name="TextBox 1"/>
           <p:cNvSpPr/>
           <p:nvPr/>
         </p:nvSpPr>
@@ -421,17 +416,12 @@
         <p:txBody>
           <a:bodyPr xmlns:a="http://schemas.openxmlformats.org/drawingml/2006/main"/>
           <a:lstStyle xmlns:a="http://schemas.openxmlformats.org/drawingml/2006/main"/>
-          <a:p xmlns:a="http://schemas.openxmlformats.org/drawingml/2006/main">
-            <a:r>
-              <a:rPr lang="en-US"/>
-              <a:t/>
-            </a:r>
-          </a:p>
-        </p:txBody>
-      </p:sp>
-      <p:sp>
-        <p:nvSpPr>
-          <p:cNvPr id="10019" name="TextBox 2"/>
+          <a:p xmlns:a="http://schemas.openxmlformats.org/drawingml/2006/main"/>
+        </p:txBody>
+      </p:sp>
+      <p:sp>
+        <p:nvSpPr>
+          <p:cNvPr id="100019" name="TextBox 2"/>
           <p:cNvSpPr txBox="1"/>
           <p:nvPr/>
         </p:nvSpPr>
@@ -480,7 +470,7 @@
       <p:grpSpPr/>
       <p:sp>
         <p:nvSpPr>
-          <p:cNvPr id="10020" name="TextBox 1"/>
+          <p:cNvPr id="100020" name="TextBox 1"/>
           <p:cNvSpPr/>
           <p:nvPr/>
         </p:nvSpPr>
@@ -499,17 +489,12 @@
         <p:txBody>
           <a:bodyPr xmlns:a="http://schemas.openxmlformats.org/drawingml/2006/main"/>
           <a:lstStyle xmlns:a="http://schemas.openxmlformats.org/drawingml/2006/main"/>
-          <a:p xmlns:a="http://schemas.openxmlformats.org/drawingml/2006/main">
-            <a:r>
-              <a:rPr lang="en-US"/>
-              <a:t/>
-            </a:r>
-          </a:p>
-        </p:txBody>
-      </p:sp>
-      <p:sp>
-        <p:nvSpPr>
-          <p:cNvPr id="10021" name="TextBox 2"/>
+          <a:p xmlns:a="http://schemas.openxmlformats.org/drawingml/2006/main"/>
+        </p:txBody>
+      </p:sp>
+      <p:sp>
+        <p:nvSpPr>
+          <p:cNvPr id="100021" name="TextBox 2"/>
           <p:cNvSpPr txBox="1"/>
           <p:nvPr/>
         </p:nvSpPr>
@@ -558,7 +543,7 @@
       <p:grpSpPr/>
       <p:sp>
         <p:nvSpPr>
-          <p:cNvPr id="10022" name="TextBox 1"/>
+          <p:cNvPr id="100022" name="TextBox 1"/>
           <p:cNvSpPr/>
           <p:nvPr/>
         </p:nvSpPr>
@@ -577,17 +562,12 @@
         <p:txBody>
           <a:bodyPr xmlns:a="http://schemas.openxmlformats.org/drawingml/2006/main"/>
           <a:lstStyle xmlns:a="http://schemas.openxmlformats.org/drawingml/2006/main"/>
-          <a:p xmlns:a="http://schemas.openxmlformats.org/drawingml/2006/main">
-            <a:r>
-              <a:rPr lang="en-US"/>
-              <a:t/>
-            </a:r>
-          </a:p>
-        </p:txBody>
-      </p:sp>
-      <p:sp>
-        <p:nvSpPr>
-          <p:cNvPr id="10023" name="TextBox 2"/>
+          <a:p xmlns:a="http://schemas.openxmlformats.org/drawingml/2006/main"/>
+        </p:txBody>
+      </p:sp>
+      <p:sp>
+        <p:nvSpPr>
+          <p:cNvPr id="100023" name="TextBox 2"/>
           <p:cNvSpPr txBox="1"/>
           <p:nvPr/>
         </p:nvSpPr>
@@ -636,7 +616,7 @@
       <p:grpSpPr/>
       <p:sp>
         <p:nvSpPr>
-          <p:cNvPr id="10024" name="TextBox 1"/>
+          <p:cNvPr id="100024" name="TextBox 1"/>
           <p:cNvSpPr/>
           <p:nvPr/>
         </p:nvSpPr>
@@ -655,17 +635,12 @@
         <p:txBody>
           <a:bodyPr xmlns:a="http://schemas.openxmlformats.org/drawingml/2006/main"/>
           <a:lstStyle xmlns:a="http://schemas.openxmlformats.org/drawingml/2006/main"/>
-          <a:p xmlns:a="http://schemas.openxmlformats.org/drawingml/2006/main">
-            <a:r>
-              <a:rPr lang="en-US"/>
-              <a:t/>
-            </a:r>
-          </a:p>
-        </p:txBody>
-      </p:sp>
-      <p:sp>
-        <p:nvSpPr>
-          <p:cNvPr id="10025" name="TextBox 2"/>
+          <a:p xmlns:a="http://schemas.openxmlformats.org/drawingml/2006/main"/>
+        </p:txBody>
+      </p:sp>
+      <p:sp>
+        <p:nvSpPr>
+          <p:cNvPr id="100025" name="TextBox 2"/>
           <p:cNvSpPr txBox="1"/>
           <p:nvPr/>
         </p:nvSpPr>
@@ -714,7 +689,7 @@
       <p:grpSpPr/>
       <p:sp>
         <p:nvSpPr>
-          <p:cNvPr id="10026" name="TextBox 1"/>
+          <p:cNvPr id="100026" name="TextBox 1"/>
           <p:cNvSpPr/>
           <p:nvPr/>
         </p:nvSpPr>
@@ -733,17 +708,12 @@
         <p:txBody>
           <a:bodyPr xmlns:a="http://schemas.openxmlformats.org/drawingml/2006/main"/>
           <a:lstStyle xmlns:a="http://schemas.openxmlformats.org/drawingml/2006/main"/>
-          <a:p xmlns:a="http://schemas.openxmlformats.org/drawingml/2006/main">
-            <a:r>
-              <a:rPr lang="en-US"/>
-              <a:t/>
-            </a:r>
-          </a:p>
-        </p:txBody>
-      </p:sp>
-      <p:sp>
-        <p:nvSpPr>
-          <p:cNvPr id="10027" name="TextBox 2"/>
+          <a:p xmlns:a="http://schemas.openxmlformats.org/drawingml/2006/main"/>
+        </p:txBody>
+      </p:sp>
+      <p:sp>
+        <p:nvSpPr>
+          <p:cNvPr id="100027" name="TextBox 2"/>
           <p:cNvSpPr txBox="1"/>
           <p:nvPr/>
         </p:nvSpPr>
@@ -792,7 +762,7 @@
       <p:grpSpPr/>
       <p:sp>
         <p:nvSpPr>
-          <p:cNvPr id="10002" name="TextBox 1"/>
+          <p:cNvPr id="100002" name="TextBox 1"/>
           <p:cNvSpPr/>
           <p:nvPr/>
         </p:nvSpPr>
@@ -811,17 +781,12 @@
         <p:txBody>
           <a:bodyPr xmlns:a="http://schemas.openxmlformats.org/drawingml/2006/main"/>
           <a:lstStyle xmlns:a="http://schemas.openxmlformats.org/drawingml/2006/main"/>
-          <a:p xmlns:a="http://schemas.openxmlformats.org/drawingml/2006/main">
-            <a:r>
-              <a:rPr lang="en-US"/>
-              <a:t/>
-            </a:r>
-          </a:p>
-        </p:txBody>
-      </p:sp>
-      <p:sp>
-        <p:nvSpPr>
-          <p:cNvPr id="10003" name="TextBox 2"/>
+          <a:p xmlns:a="http://schemas.openxmlformats.org/drawingml/2006/main"/>
+        </p:txBody>
+      </p:sp>
+      <p:sp>
+        <p:nvSpPr>
+          <p:cNvPr id="100003" name="TextBox 2"/>
           <p:cNvSpPr txBox="1"/>
           <p:nvPr/>
         </p:nvSpPr>
@@ -870,7 +835,7 @@
       <p:grpSpPr/>
       <p:sp>
         <p:nvSpPr>
-          <p:cNvPr id="10004" name="TextBox 1"/>
+          <p:cNvPr id="100004" name="TextBox 1"/>
           <p:cNvSpPr/>
           <p:nvPr/>
         </p:nvSpPr>
@@ -889,17 +854,12 @@
         <p:txBody>
           <a:bodyPr xmlns:a="http://schemas.openxmlformats.org/drawingml/2006/main"/>
           <a:lstStyle xmlns:a="http://schemas.openxmlformats.org/drawingml/2006/main"/>
-          <a:p xmlns:a="http://schemas.openxmlformats.org/drawingml/2006/main">
-            <a:r>
-              <a:rPr lang="en-US"/>
-              <a:t/>
-            </a:r>
-          </a:p>
-        </p:txBody>
-      </p:sp>
-      <p:sp>
-        <p:nvSpPr>
-          <p:cNvPr id="10005" name="TextBox 2"/>
+          <a:p xmlns:a="http://schemas.openxmlformats.org/drawingml/2006/main"/>
+        </p:txBody>
+      </p:sp>
+      <p:sp>
+        <p:nvSpPr>
+          <p:cNvPr id="100005" name="TextBox 2"/>
           <p:cNvSpPr txBox="1"/>
           <p:nvPr/>
         </p:nvSpPr>
@@ -948,7 +908,7 @@
       <p:grpSpPr/>
       <p:sp>
         <p:nvSpPr>
-          <p:cNvPr id="10006" name="TextBox 1"/>
+          <p:cNvPr id="100006" name="TextBox 1"/>
           <p:cNvSpPr/>
           <p:nvPr/>
         </p:nvSpPr>
@@ -967,17 +927,12 @@
         <p:txBody>
           <a:bodyPr xmlns:a="http://schemas.openxmlformats.org/drawingml/2006/main"/>
           <a:lstStyle xmlns:a="http://schemas.openxmlformats.org/drawingml/2006/main"/>
-          <a:p xmlns:a="http://schemas.openxmlformats.org/drawingml/2006/main">
-            <a:r>
-              <a:rPr lang="en-US"/>
-              <a:t/>
-            </a:r>
-          </a:p>
-        </p:txBody>
-      </p:sp>
-      <p:sp>
-        <p:nvSpPr>
-          <p:cNvPr id="10007" name="TextBox 2"/>
+          <a:p xmlns:a="http://schemas.openxmlformats.org/drawingml/2006/main"/>
+        </p:txBody>
+      </p:sp>
+      <p:sp>
+        <p:nvSpPr>
+          <p:cNvPr id="100007" name="TextBox 2"/>
           <p:cNvSpPr txBox="1"/>
           <p:nvPr/>
         </p:nvSpPr>
@@ -1026,7 +981,7 @@
       <p:grpSpPr/>
       <p:sp>
         <p:nvSpPr>
-          <p:cNvPr id="10008" name="TextBox 1"/>
+          <p:cNvPr id="100008" name="TextBox 1"/>
           <p:cNvSpPr/>
           <p:nvPr/>
         </p:nvSpPr>
@@ -1045,17 +1000,12 @@
         <p:txBody>
           <a:bodyPr xmlns:a="http://schemas.openxmlformats.org/drawingml/2006/main"/>
           <a:lstStyle xmlns:a="http://schemas.openxmlformats.org/drawingml/2006/main"/>
-          <a:p xmlns:a="http://schemas.openxmlformats.org/drawingml/2006/main">
-            <a:r>
-              <a:rPr lang="en-US"/>
-              <a:t/>
-            </a:r>
-          </a:p>
-        </p:txBody>
-      </p:sp>
-      <p:sp>
-        <p:nvSpPr>
-          <p:cNvPr id="10009" name="TextBox 2"/>
+          <a:p xmlns:a="http://schemas.openxmlformats.org/drawingml/2006/main"/>
+        </p:txBody>
+      </p:sp>
+      <p:sp>
+        <p:nvSpPr>
+          <p:cNvPr id="100009" name="TextBox 2"/>
           <p:cNvSpPr txBox="1"/>
           <p:nvPr/>
         </p:nvSpPr>
@@ -1104,7 +1054,7 @@
       <p:grpSpPr/>
       <p:sp>
         <p:nvSpPr>
-          <p:cNvPr id="10010" name="TextBox 1"/>
+          <p:cNvPr id="100010" name="TextBox 1"/>
           <p:cNvSpPr/>
           <p:nvPr/>
         </p:nvSpPr>
@@ -1123,17 +1073,12 @@
         <p:txBody>
           <a:bodyPr xmlns:a="http://schemas.openxmlformats.org/drawingml/2006/main"/>
           <a:lstStyle xmlns:a="http://schemas.openxmlformats.org/drawingml/2006/main"/>
-          <a:p xmlns:a="http://schemas.openxmlformats.org/drawingml/2006/main">
-            <a:r>
-              <a:rPr lang="en-US"/>
-              <a:t/>
-            </a:r>
-          </a:p>
-        </p:txBody>
-      </p:sp>
-      <p:sp>
-        <p:nvSpPr>
-          <p:cNvPr id="10011" name="TextBox 2"/>
+          <a:p xmlns:a="http://schemas.openxmlformats.org/drawingml/2006/main"/>
+        </p:txBody>
+      </p:sp>
+      <p:sp>
+        <p:nvSpPr>
+          <p:cNvPr id="100011" name="TextBox 2"/>
           <p:cNvSpPr txBox="1"/>
           <p:nvPr/>
         </p:nvSpPr>
@@ -1182,7 +1127,7 @@
       <p:grpSpPr/>
       <p:sp>
         <p:nvSpPr>
-          <p:cNvPr id="10012" name="TextBox 1"/>
+          <p:cNvPr id="100012" name="TextBox 1"/>
           <p:cNvSpPr/>
           <p:nvPr/>
         </p:nvSpPr>
@@ -1201,17 +1146,12 @@
         <p:txBody>
           <a:bodyPr xmlns:a="http://schemas.openxmlformats.org/drawingml/2006/main"/>
           <a:lstStyle xmlns:a="http://schemas.openxmlformats.org/drawingml/2006/main"/>
-          <a:p xmlns:a="http://schemas.openxmlformats.org/drawingml/2006/main">
-            <a:r>
-              <a:rPr lang="en-US"/>
-              <a:t/>
-            </a:r>
-          </a:p>
-        </p:txBody>
-      </p:sp>
-      <p:sp>
-        <p:nvSpPr>
-          <p:cNvPr id="10013" name="TextBox 2"/>
+          <a:p xmlns:a="http://schemas.openxmlformats.org/drawingml/2006/main"/>
+        </p:txBody>
+      </p:sp>
+      <p:sp>
+        <p:nvSpPr>
+          <p:cNvPr id="100013" name="TextBox 2"/>
           <p:cNvSpPr txBox="1"/>
           <p:nvPr/>
         </p:nvSpPr>
@@ -1260,7 +1200,7 @@
       <p:grpSpPr/>
       <p:sp>
         <p:nvSpPr>
-          <p:cNvPr id="10014" name="TextBox 1"/>
+          <p:cNvPr id="100014" name="TextBox 1"/>
           <p:cNvSpPr/>
           <p:nvPr/>
         </p:nvSpPr>
@@ -1279,17 +1219,12 @@
         <p:txBody>
           <a:bodyPr xmlns:a="http://schemas.openxmlformats.org/drawingml/2006/main"/>
           <a:lstStyle xmlns:a="http://schemas.openxmlformats.org/drawingml/2006/main"/>
-          <a:p xmlns:a="http://schemas.openxmlformats.org/drawingml/2006/main">
-            <a:r>
-              <a:rPr lang="en-US"/>
-              <a:t/>
-            </a:r>
-          </a:p>
-        </p:txBody>
-      </p:sp>
-      <p:sp>
-        <p:nvSpPr>
-          <p:cNvPr id="10015" name="TextBox 2"/>
+          <a:p xmlns:a="http://schemas.openxmlformats.org/drawingml/2006/main"/>
+        </p:txBody>
+      </p:sp>
+      <p:sp>
+        <p:nvSpPr>
+          <p:cNvPr id="100015" name="TextBox 2"/>
           <p:cNvSpPr txBox="1"/>
           <p:nvPr/>
         </p:nvSpPr>
@@ -1347,7 +1282,7 @@
       <p:grpSpPr/>
       <p:sp>
         <p:nvSpPr>
-          <p:cNvPr id="10016" name="TextBox 1"/>
+          <p:cNvPr id="100016" name="TextBox 1"/>
           <p:cNvSpPr/>
           <p:nvPr/>
         </p:nvSpPr>
@@ -1366,17 +1301,12 @@
         <p:txBody>
           <a:bodyPr xmlns:a="http://schemas.openxmlformats.org/drawingml/2006/main"/>
           <a:lstStyle xmlns:a="http://schemas.openxmlformats.org/drawingml/2006/main"/>
-          <a:p xmlns:a="http://schemas.openxmlformats.org/drawingml/2006/main">
-            <a:r>
-              <a:rPr lang="en-US"/>
-              <a:t/>
-            </a:r>
-          </a:p>
-        </p:txBody>
-      </p:sp>
-      <p:sp>
-        <p:nvSpPr>
-          <p:cNvPr id="10017" name="TextBox 2"/>
+          <a:p xmlns:a="http://schemas.openxmlformats.org/drawingml/2006/main"/>
+        </p:txBody>
+      </p:sp>
+      <p:sp>
+        <p:nvSpPr>
+          <p:cNvPr id="100017" name="TextBox 2"/>
           <p:cNvSpPr txBox="1"/>
           <p:nvPr/>
         </p:nvSpPr>
@@ -1410,7 +1340,7 @@
   <mc:AlternateContent>
     <mc:Choice Requires="p15">
       <p:transition xmlns:p15="http://schemas.microsoft.com/office/powerpoint/2012/main">
-        <p15:prstTrans prst="box" invX="1" invY="1"/>
+        <p15:prstTrans prst="box" invX="1"/>
       </p:transition>
     </mc:Choice>
     <mc:Fallback>
